--- a/ss2_code_org/baitap/calculating average/calculating average.pptx
+++ b/ss2_code_org/baitap/calculating average/calculating average.pptx
@@ -259,7 +259,7 @@
           <a:p>
             <a:fld id="{64396880-0AD4-443C-B918-9809383EB9A3}" type="datetimeFigureOut">
               <a:rPr lang="en-US" smtClean="0"/>
-              <a:t>10/3/2022</a:t>
+              <a:t>10/8/2022</a:t>
             </a:fld>
             <a:endParaRPr lang="en-US"/>
           </a:p>
@@ -457,7 +457,7 @@
           <a:p>
             <a:fld id="{64396880-0AD4-443C-B918-9809383EB9A3}" type="datetimeFigureOut">
               <a:rPr lang="en-US" smtClean="0"/>
-              <a:t>10/3/2022</a:t>
+              <a:t>10/8/2022</a:t>
             </a:fld>
             <a:endParaRPr lang="en-US"/>
           </a:p>
@@ -665,7 +665,7 @@
           <a:p>
             <a:fld id="{64396880-0AD4-443C-B918-9809383EB9A3}" type="datetimeFigureOut">
               <a:rPr lang="en-US" smtClean="0"/>
-              <a:t>10/3/2022</a:t>
+              <a:t>10/8/2022</a:t>
             </a:fld>
             <a:endParaRPr lang="en-US"/>
           </a:p>
@@ -863,7 +863,7 @@
           <a:p>
             <a:fld id="{64396880-0AD4-443C-B918-9809383EB9A3}" type="datetimeFigureOut">
               <a:rPr lang="en-US" smtClean="0"/>
-              <a:t>10/3/2022</a:t>
+              <a:t>10/8/2022</a:t>
             </a:fld>
             <a:endParaRPr lang="en-US"/>
           </a:p>
@@ -1138,7 +1138,7 @@
           <a:p>
             <a:fld id="{64396880-0AD4-443C-B918-9809383EB9A3}" type="datetimeFigureOut">
               <a:rPr lang="en-US" smtClean="0"/>
-              <a:t>10/3/2022</a:t>
+              <a:t>10/8/2022</a:t>
             </a:fld>
             <a:endParaRPr lang="en-US"/>
           </a:p>
@@ -1403,7 +1403,7 @@
           <a:p>
             <a:fld id="{64396880-0AD4-443C-B918-9809383EB9A3}" type="datetimeFigureOut">
               <a:rPr lang="en-US" smtClean="0"/>
-              <a:t>10/3/2022</a:t>
+              <a:t>10/8/2022</a:t>
             </a:fld>
             <a:endParaRPr lang="en-US"/>
           </a:p>
@@ -1815,7 +1815,7 @@
           <a:p>
             <a:fld id="{64396880-0AD4-443C-B918-9809383EB9A3}" type="datetimeFigureOut">
               <a:rPr lang="en-US" smtClean="0"/>
-              <a:t>10/3/2022</a:t>
+              <a:t>10/8/2022</a:t>
             </a:fld>
             <a:endParaRPr lang="en-US"/>
           </a:p>
@@ -1956,7 +1956,7 @@
           <a:p>
             <a:fld id="{64396880-0AD4-443C-B918-9809383EB9A3}" type="datetimeFigureOut">
               <a:rPr lang="en-US" smtClean="0"/>
-              <a:t>10/3/2022</a:t>
+              <a:t>10/8/2022</a:t>
             </a:fld>
             <a:endParaRPr lang="en-US"/>
           </a:p>
@@ -2069,7 +2069,7 @@
           <a:p>
             <a:fld id="{64396880-0AD4-443C-B918-9809383EB9A3}" type="datetimeFigureOut">
               <a:rPr lang="en-US" smtClean="0"/>
-              <a:t>10/3/2022</a:t>
+              <a:t>10/8/2022</a:t>
             </a:fld>
             <a:endParaRPr lang="en-US"/>
           </a:p>
@@ -2380,7 +2380,7 @@
           <a:p>
             <a:fld id="{64396880-0AD4-443C-B918-9809383EB9A3}" type="datetimeFigureOut">
               <a:rPr lang="en-US" smtClean="0"/>
-              <a:t>10/3/2022</a:t>
+              <a:t>10/8/2022</a:t>
             </a:fld>
             <a:endParaRPr lang="en-US"/>
           </a:p>
@@ -2668,7 +2668,7 @@
           <a:p>
             <a:fld id="{64396880-0AD4-443C-B918-9809383EB9A3}" type="datetimeFigureOut">
               <a:rPr lang="en-US" smtClean="0"/>
-              <a:t>10/3/2022</a:t>
+              <a:t>10/8/2022</a:t>
             </a:fld>
             <a:endParaRPr lang="en-US"/>
           </a:p>
@@ -2909,7 +2909,7 @@
           <a:p>
             <a:fld id="{64396880-0AD4-443C-B918-9809383EB9A3}" type="datetimeFigureOut">
               <a:rPr lang="en-US" smtClean="0"/>
-              <a:t>10/3/2022</a:t>
+              <a:t>10/8/2022</a:t>
             </a:fld>
             <a:endParaRPr lang="en-US"/>
           </a:p>
@@ -3800,6 +3800,193 @@
           </a:p>
         </p:txBody>
       </p:sp>
+      <p:sp>
+        <p:nvSpPr>
+          <p:cNvPr id="3" name="TextBox 2">
+            <a:extLst>
+              <a:ext uri="{FF2B5EF4-FFF2-40B4-BE49-F238E27FC236}">
+                <a16:creationId xmlns:a16="http://schemas.microsoft.com/office/drawing/2014/main" id="{0670168D-84DB-44A5-BE85-CD703976854E}"/>
+              </a:ext>
+            </a:extLst>
+          </p:cNvPr>
+          <p:cNvSpPr txBox="1"/>
+          <p:nvPr/>
+        </p:nvSpPr>
+        <p:spPr>
+          <a:xfrm>
+            <a:off x="8163328" y="689115"/>
+            <a:ext cx="3677481" cy="2862322"/>
+          </a:xfrm>
+          <a:prstGeom prst="rect">
+            <a:avLst/>
+          </a:prstGeom>
+        </p:spPr>
+        <p:style>
+          <a:lnRef idx="2">
+            <a:schemeClr val="accent2"/>
+          </a:lnRef>
+          <a:fillRef idx="1">
+            <a:schemeClr val="lt1"/>
+          </a:fillRef>
+          <a:effectRef idx="0">
+            <a:schemeClr val="accent2"/>
+          </a:effectRef>
+          <a:fontRef idx="minor">
+            <a:schemeClr val="dk1"/>
+          </a:fontRef>
+        </p:style>
+        <p:txBody>
+          <a:bodyPr wrap="square" rtlCol="0">
+            <a:spAutoFit/>
+          </a:bodyPr>
+          <a:lstStyle/>
+          <a:p>
+            <a:r>
+              <a:rPr lang="en-US" dirty="0"/>
+              <a:t>BEGIN</a:t>
+            </a:r>
+          </a:p>
+          <a:p>
+            <a:pPr algn="ctr"/>
+            <a:r>
+              <a:rPr lang="en-US" dirty="0"/>
+              <a:t>   </a:t>
+            </a:r>
+          </a:p>
+          <a:p>
+            <a:pPr algn="ctr"/>
+            <a:r>
+              <a:rPr lang="en-US" dirty="0"/>
+              <a:t>INPUT </a:t>
+            </a:r>
+            <a:r>
+              <a:rPr lang="en-US" dirty="0">
+                <a:solidFill>
+                  <a:schemeClr val="tx1">
+                    <a:lumMod val="95000"/>
+                    <a:lumOff val="5000"/>
+                  </a:schemeClr>
+                </a:solidFill>
+              </a:rPr>
+              <a:t>M: point of  Math</a:t>
+            </a:r>
+          </a:p>
+          <a:p>
+            <a:pPr algn="ctr"/>
+            <a:r>
+              <a:rPr lang="en-US" dirty="0">
+                <a:solidFill>
+                  <a:schemeClr val="tx1">
+                    <a:lumMod val="95000"/>
+                    <a:lumOff val="5000"/>
+                  </a:schemeClr>
+                </a:solidFill>
+              </a:rPr>
+              <a:t> </a:t>
+            </a:r>
+            <a:r>
+              <a:rPr lang="en-US" dirty="0"/>
+              <a:t>INPUT</a:t>
+            </a:r>
+            <a:r>
+              <a:rPr lang="en-US" dirty="0">
+                <a:solidFill>
+                  <a:schemeClr val="tx1">
+                    <a:lumMod val="95000"/>
+                    <a:lumOff val="5000"/>
+                  </a:schemeClr>
+                </a:solidFill>
+              </a:rPr>
+              <a:t> P: point of Physics</a:t>
+            </a:r>
+          </a:p>
+          <a:p>
+            <a:pPr algn="ctr"/>
+            <a:r>
+              <a:rPr lang="en-US" dirty="0">
+                <a:solidFill>
+                  <a:schemeClr val="tx1">
+                    <a:lumMod val="95000"/>
+                    <a:lumOff val="5000"/>
+                  </a:schemeClr>
+                </a:solidFill>
+              </a:rPr>
+              <a:t>           </a:t>
+            </a:r>
+            <a:r>
+              <a:rPr lang="en-US" dirty="0"/>
+              <a:t>INPUT</a:t>
+            </a:r>
+            <a:r>
+              <a:rPr lang="en-US" dirty="0">
+                <a:solidFill>
+                  <a:schemeClr val="tx1">
+                    <a:lumMod val="95000"/>
+                    <a:lumOff val="5000"/>
+                  </a:schemeClr>
+                </a:solidFill>
+              </a:rPr>
+              <a:t>    C : point of Chemistry</a:t>
+            </a:r>
+          </a:p>
+          <a:p>
+            <a:pPr algn="ctr"/>
+            <a:r>
+              <a:rPr lang="en-US" dirty="0">
+                <a:solidFill>
+                  <a:schemeClr val="tx1">
+                    <a:lumMod val="95000"/>
+                    <a:lumOff val="5000"/>
+                  </a:schemeClr>
+                </a:solidFill>
+              </a:rPr>
+              <a:t>A=(M+P+C)/3</a:t>
+            </a:r>
+          </a:p>
+          <a:p>
+            <a:pPr algn="ctr"/>
+            <a:r>
+              <a:rPr lang="en-US" dirty="0">
+                <a:solidFill>
+                  <a:schemeClr val="tx1">
+                    <a:lumMod val="95000"/>
+                    <a:lumOff val="5000"/>
+                  </a:schemeClr>
+                </a:solidFill>
+              </a:rPr>
+              <a:t>DISPLAY A       </a:t>
+            </a:r>
+          </a:p>
+          <a:p>
+            <a:pPr algn="ctr"/>
+            <a:r>
+              <a:rPr lang="en-US" dirty="0">
+                <a:solidFill>
+                  <a:schemeClr val="tx1">
+                    <a:lumMod val="95000"/>
+                    <a:lumOff val="5000"/>
+                  </a:schemeClr>
+                </a:solidFill>
+              </a:rPr>
+              <a:t>END                                                              </a:t>
+            </a:r>
+          </a:p>
+          <a:p>
+            <a:pPr algn="ctr"/>
+            <a:endParaRPr lang="en-US" dirty="0">
+              <a:solidFill>
+                <a:schemeClr val="tx1">
+                  <a:lumMod val="95000"/>
+                  <a:lumOff val="5000"/>
+                </a:schemeClr>
+              </a:solidFill>
+            </a:endParaRPr>
+          </a:p>
+          <a:p>
+            <a:endParaRPr lang="en-US" dirty="0"/>
+          </a:p>
+        </p:txBody>
+      </p:sp>
     </p:spTree>
     <p:extLst>
       <p:ext uri="{BB962C8B-B14F-4D97-AF65-F5344CB8AC3E}">
